--- a/docs/video-series/02_Algo_MAX_Подробный_обзор.pptx
+++ b/docs/video-series/02_Algo_MAX_Подробный_обзор.pptx
@@ -3486,7 +3486,7 @@
         <p:spPr>
           <a:xfrm>
             <a:off x="603504" y="6016752"/>
-            <a:ext cx="2377440" cy="228600"/>
+            <a:ext cx="3383280" cy="228600"/>
           </a:xfrm>
           <a:prstGeom prst="rect">
             <a:avLst/>
@@ -3517,7 +3517,7 @@
                 </a:solidFill>
                 <a:latin typeface="Arial"/>
               </a:rPr>
-              <a:t>Август 2026</a:t>
+              <a:t>Сентябрь 2026 · интерфейс 0.86.2</a:t>
             </a:r>
           </a:p>
         </p:txBody>
@@ -5651,7 +5651,7 @@
                 </a:solidFill>
                 <a:latin typeface="Arial"/>
               </a:rPr>
-              <a:t>подарок 50 AC начисляется в день рождения.</a:t>
+              <a:t>настраиваемая сумма начисляется в день рождения.</a:t>
             </a:r>
           </a:p>
         </p:txBody>
@@ -7222,7 +7222,7 @@
                 </a:solidFill>
                 <a:latin typeface="Arial"/>
               </a:rPr>
-              <a:t>Остатки задаются по складам прямо в карточке товара.</a:t>
+              <a:t>Остатки задаются по складам, каталог фильтруется по складу.</a:t>
             </a:r>
           </a:p>
         </p:txBody>
@@ -7750,7 +7750,7 @@
                 </a:solidFill>
                 <a:latin typeface="Arial"/>
               </a:rPr>
-              <a:t>Каталог можно массово заполнить через подготовленный XLSX-шаблон.</a:t>
+              <a:t>XLSX-шаблон принимает фото по прямой или облачной ссылке.</a:t>
             </a:r>
           </a:p>
         </p:txBody>
@@ -18439,7 +18439,7 @@
                 </a:solidFill>
                 <a:latin typeface="Arial"/>
               </a:rPr>
-              <a:t>Директор работает только с назначенными ему филиалами и проверяет выбранный город перед изменением.</a:t>
+              <a:t>Сотрудник работает только с назначенными ему ролями и городами и проверяет выбранный город перед изменением.</a:t>
             </a:r>
           </a:p>
         </p:txBody>
@@ -24482,8 +24482,8 @@
         </p:blipFill>
         <p:spPr>
           <a:xfrm>
-            <a:off x="862086" y="2176272"/>
-            <a:ext cx="5783051" cy="3995928"/>
+            <a:off x="556870" y="2176272"/>
+            <a:ext cx="6393484" cy="3995928"/>
           </a:xfrm>
           <a:prstGeom prst="rect">
             <a:avLst/>
@@ -24618,7 +24618,7 @@
                 </a:solidFill>
                 <a:latin typeface="Arial"/>
               </a:rPr>
-              <a:t>видит только назначенные группы;</a:t>
+              <a:t>вводит ФИО как в LMS и автоматически находит группы;</a:t>
             </a:r>
           </a:p>
         </p:txBody>
@@ -27018,7 +27018,7 @@
                 </a:solidFill>
                 <a:latin typeface="Arial"/>
               </a:rPr>
-              <a:t>управляет учениками, связями и сотрудниками;</a:t>
+              <a:t>управляет учениками, связями и ролями сотрудников;</a:t>
             </a:r>
           </a:p>
         </p:txBody>
